--- a/public/fun/cards/beauty/beauty-01.pptx
+++ b/public/fun/cards/beauty/beauty-01.pptx
@@ -3085,7 +3085,7 @@
     <p:bg>
       <p:bgPr>
         <a:solidFill>
-          <a:srgbClr val="573371"/>
+          <a:srgbClr val="A6E22E"/>
         </a:solidFill>
         <a:effectLst/>
       </p:bgPr>
@@ -3099,20 +3099,60 @@
       <p:grpSpPr/>
       <p:sp>
         <p:nvSpPr>
-          <p:cNvPr id="2" name="Rectangle 1"/>
-          <p:cNvSpPr/>
+          <p:cNvPr id="2" name="텍스트"/>
+          <p:cNvSpPr txBox="1"/>
           <p:nvPr/>
         </p:nvSpPr>
         <p:spPr>
           <a:xfrm>
-            <a:off x="0" y="0"/>
-            <a:ext cx="165600" cy="1800000"/>
+            <a:off x="252000" y="223200"/>
+            <a:ext cx="2016000" cy="133351"/>
           </a:xfrm>
           <a:prstGeom prst="rect">
             <a:avLst/>
           </a:prstGeom>
+          <a:noFill/>
+        </p:spPr>
+        <p:txBody>
+          <a:bodyPr wrap="square" lIns="0" rIns="0" tIns="0" bIns="0" anchor="t">
+            <a:spAutoFit/>
+          </a:bodyPr>
+          <a:lstStyle/>
+          <a:p>
+            <a:pPr algn="l">
+              <a:lnSpc>
+                <a:spcPts val="1015"/>
+              </a:lnSpc>
+            </a:pPr>
+            <a:r>
+              <a:rPr sz="700" b="1" spc="200">
+                <a:solidFill>
+                  <a:srgbClr val="334220"/>
+                </a:solidFill>
+                <a:latin typeface="맑은 고딕"/>
+                <a:ea typeface="맑은 고딕"/>
+              </a:rPr>
+              <a:t>샵 이름</a:t>
+            </a:r>
+          </a:p>
+        </p:txBody>
+      </p:sp>
+      <p:sp>
+        <p:nvSpPr>
+          <p:cNvPr id="3" name="Oval 2"/>
+          <p:cNvSpPr/>
+          <p:nvPr/>
+        </p:nvSpPr>
+        <p:spPr>
+          <a:xfrm>
+            <a:off x="2955600" y="241200"/>
+            <a:ext cx="64800" cy="64800"/>
+          </a:xfrm>
+          <a:prstGeom prst="ellipse">
+            <a:avLst/>
+          </a:prstGeom>
           <a:solidFill>
-            <a:srgbClr val="AC85C8"/>
+            <a:srgbClr val="12151C"/>
           </a:solidFill>
           <a:ln>
             <a:noFill/>
@@ -3128,88 +3168,81 @@
       </p:sp>
       <p:sp>
         <p:nvSpPr>
-          <p:cNvPr id="3" name="Rectangle 2"/>
-          <p:cNvSpPr/>
+          <p:cNvPr id="4" name="텍스트"/>
+          <p:cNvSpPr txBox="1"/>
           <p:nvPr/>
         </p:nvSpPr>
         <p:spPr>
           <a:xfrm>
-            <a:off x="165600" y="0"/>
-            <a:ext cx="36000" cy="1800000"/>
+            <a:off x="252000" y="676800"/>
+            <a:ext cx="2520000" cy="360000"/>
           </a:xfrm>
           <a:prstGeom prst="rect">
             <a:avLst/>
           </a:prstGeom>
-          <a:solidFill>
-            <a:srgbClr val="725488"/>
-          </a:solidFill>
-          <a:ln>
-            <a:noFill/>
-          </a:ln>
+          <a:noFill/>
         </p:spPr>
         <p:txBody>
-          <a:bodyPr rtlCol="0" anchor="ctr"/>
-          <a:lstStyle/>
-          <a:p>
-            <a:pPr algn="ctr"/>
-          </a:p>
-        </p:txBody>
-      </p:sp>
-      <p:sp>
-        <p:nvSpPr>
-          <p:cNvPr id="4" name="Oval 3"/>
-          <p:cNvSpPr/>
+          <a:bodyPr wrap="square" lIns="0" rIns="0" tIns="0" bIns="0" anchor="t">
+            <a:spAutoFit/>
+          </a:bodyPr>
+          <a:lstStyle/>
+          <a:p>
+            <a:pPr algn="l">
+              <a:lnSpc>
+                <a:spcPts val="3190"/>
+              </a:lnSpc>
+            </a:pPr>
+            <a:r>
+              <a:rPr sz="2200" b="1">
+                <a:solidFill>
+                  <a:srgbClr val="12151C"/>
+                </a:solidFill>
+                <a:latin typeface="맑은 고딕"/>
+                <a:ea typeface="맑은 고딕"/>
+              </a:rPr>
+              <a:t>김하늘</a:t>
+            </a:r>
+          </a:p>
+        </p:txBody>
+      </p:sp>
+      <p:sp>
+        <p:nvSpPr>
+          <p:cNvPr id="5" name="텍스트"/>
+          <p:cNvSpPr txBox="1"/>
           <p:nvPr/>
         </p:nvSpPr>
         <p:spPr>
           <a:xfrm>
-            <a:off x="2687040" y="429840"/>
-            <a:ext cx="89856" cy="89856"/>
+            <a:off x="252000" y="1080000"/>
+            <a:ext cx="2520000" cy="171451"/>
           </a:xfrm>
-          <a:prstGeom prst="ellipse">
+          <a:prstGeom prst="rect">
             <a:avLst/>
           </a:prstGeom>
           <a:noFill/>
-          <a:ln w="20736">
-            <a:solidFill>
-              <a:srgbClr val="AC85C8"/>
-            </a:solidFill>
-          </a:ln>
         </p:spPr>
         <p:txBody>
-          <a:bodyPr rtlCol="0" anchor="ctr"/>
-          <a:lstStyle/>
-          <a:p>
-            <a:pPr algn="ctr"/>
-          </a:p>
-        </p:txBody>
-      </p:sp>
-      <p:sp>
-        <p:nvSpPr>
-          <p:cNvPr id="5" name="Oval 4"/>
-          <p:cNvSpPr/>
-          <p:nvPr/>
-        </p:nvSpPr>
-        <p:spPr>
-          <a:xfrm>
-            <a:off x="2839104" y="429840"/>
-            <a:ext cx="89856" cy="89856"/>
-          </a:xfrm>
-          <a:prstGeom prst="ellipse">
-            <a:avLst/>
-          </a:prstGeom>
-          <a:noFill/>
-          <a:ln w="20736">
-            <a:solidFill>
-              <a:srgbClr val="AC85C8"/>
-            </a:solidFill>
-          </a:ln>
-        </p:spPr>
-        <p:txBody>
-          <a:bodyPr rtlCol="0" anchor="ctr"/>
-          <a:lstStyle/>
-          <a:p>
-            <a:pPr algn="ctr"/>
+          <a:bodyPr wrap="square" lIns="0" rIns="0" tIns="0" bIns="0" anchor="t">
+            <a:spAutoFit/>
+          </a:bodyPr>
+          <a:lstStyle/>
+          <a:p>
+            <a:pPr algn="l">
+              <a:lnSpc>
+                <a:spcPts val="1305"/>
+              </a:lnSpc>
+            </a:pPr>
+            <a:r>
+              <a:rPr sz="900" b="0">
+                <a:solidFill>
+                  <a:srgbClr val="334220"/>
+                </a:solidFill>
+                <a:latin typeface="맑은 고딕"/>
+                <a:ea typeface="맑은 고딕"/>
+              </a:rPr>
+              <a:t>헤어 디자이너</a:t>
+            </a:r>
           </a:p>
         </p:txBody>
       </p:sp>
@@ -3220,51 +3253,30 @@
           <p:nvPr/>
         </p:nvCxnSpPr>
         <p:spPr>
-          <a:xfrm flipV="1">
-            <a:off x="2759616" y="232848"/>
-            <a:ext cx="131328" cy="207360"/>
+          <a:xfrm>
+            <a:off x="252000" y="1339200"/>
+            <a:ext cx="2736000" cy="0"/>
           </a:xfrm>
           <a:prstGeom prst="line">
             <a:avLst/>
           </a:prstGeom>
-          <a:ln w="24192">
+          <a:ln w="5760">
             <a:solidFill>
-              <a:srgbClr val="725488"/>
+              <a:srgbClr val="6B9027"/>
             </a:solidFill>
           </a:ln>
         </p:spPr>
       </p:cxnSp>
-      <p:cxnSp>
-        <p:nvCxnSpPr>
-          <p:cNvPr id="7" name="Connector 6"/>
-          <p:cNvCxnSpPr/>
-          <p:nvPr/>
-        </p:nvCxnSpPr>
-        <p:spPr>
-          <a:xfrm flipH="1" flipV="1">
-            <a:off x="2725056" y="232848"/>
-            <a:ext cx="131328" cy="207360"/>
-          </a:xfrm>
-          <a:prstGeom prst="line">
-            <a:avLst/>
-          </a:prstGeom>
-          <a:ln w="24192">
-            <a:solidFill>
-              <a:srgbClr val="AC85C8"/>
-            </a:solidFill>
-          </a:ln>
-        </p:spPr>
-      </p:cxnSp>
-      <p:sp>
-        <p:nvSpPr>
-          <p:cNvPr id="8" name="텍스트"/>
+      <p:sp>
+        <p:nvSpPr>
+          <p:cNvPr id="7" name="텍스트"/>
           <p:cNvSpPr txBox="1"/>
           <p:nvPr/>
         </p:nvSpPr>
         <p:spPr>
           <a:xfrm>
-            <a:off x="396000" y="223200"/>
-            <a:ext cx="2016000" cy="108000"/>
+            <a:off x="252000" y="1411200"/>
+            <a:ext cx="792000" cy="129541"/>
           </a:xfrm>
           <a:prstGeom prst="rect">
             <a:avLst/>
@@ -3279,32 +3291,32 @@
           <a:p>
             <a:pPr algn="l">
               <a:lnSpc>
-                <a:spcPts val="1087"/>
+                <a:spcPts val="986"/>
               </a:lnSpc>
             </a:pPr>
             <a:r>
-              <a:rPr sz="750" b="1" spc="150">
+              <a:rPr sz="680" b="0">
                 <a:solidFill>
-                  <a:srgbClr val="C4B8CD"/>
+                  <a:srgbClr val="12151C"/>
                 </a:solidFill>
                 <a:latin typeface="맑은 고딕"/>
                 <a:ea typeface="맑은 고딕"/>
               </a:rPr>
-              <a:t>샵 이름</a:t>
-            </a:r>
-          </a:p>
-        </p:txBody>
-      </p:sp>
-      <p:sp>
-        <p:nvSpPr>
-          <p:cNvPr id="9" name="텍스트"/>
+              <a:t>010-1234-5678</a:t>
+            </a:r>
+          </a:p>
+        </p:txBody>
+      </p:sp>
+      <p:sp>
+        <p:nvSpPr>
+          <p:cNvPr id="8" name="텍스트"/>
           <p:cNvSpPr txBox="1"/>
           <p:nvPr/>
         </p:nvSpPr>
         <p:spPr>
           <a:xfrm>
-            <a:off x="396000" y="540000"/>
-            <a:ext cx="2160000" cy="313692"/>
+            <a:off x="1080000" y="1411200"/>
+            <a:ext cx="900000" cy="129541"/>
           </a:xfrm>
           <a:prstGeom prst="rect">
             <a:avLst/>
@@ -3319,32 +3331,32 @@
           <a:p>
             <a:pPr algn="l">
               <a:lnSpc>
-                <a:spcPts val="2755"/>
+                <a:spcPts val="986"/>
               </a:lnSpc>
             </a:pPr>
             <a:r>
-              <a:rPr sz="1900" b="1" spc="50">
+              <a:rPr sz="680" b="0">
                 <a:solidFill>
-                  <a:srgbClr val="FFFFFF"/>
+                  <a:srgbClr val="12151C"/>
                 </a:solidFill>
-                <a:latin typeface="바탕"/>
-                <a:ea typeface="바탕"/>
+                <a:latin typeface="맑은 고딕"/>
+                <a:ea typeface="맑은 고딕"/>
               </a:rPr>
-              <a:t>김하늘</a:t>
-            </a:r>
-          </a:p>
-        </p:txBody>
-      </p:sp>
-      <p:sp>
-        <p:nvSpPr>
-          <p:cNvPr id="10" name="텍스트"/>
+              <a:t>name@example.com</a:t>
+            </a:r>
+          </a:p>
+        </p:txBody>
+      </p:sp>
+      <p:sp>
+        <p:nvSpPr>
+          <p:cNvPr id="9" name="텍스트"/>
           <p:cNvSpPr txBox="1"/>
           <p:nvPr/>
         </p:nvSpPr>
         <p:spPr>
           <a:xfrm>
-            <a:off x="396000" y="835200"/>
-            <a:ext cx="2160000" cy="129600"/>
+            <a:off x="2052000" y="1411200"/>
+            <a:ext cx="972000" cy="129541"/>
           </a:xfrm>
           <a:prstGeom prst="rect">
             <a:avLst/>
@@ -3359,61 +3371,32 @@
           <a:p>
             <a:pPr algn="l">
               <a:lnSpc>
-                <a:spcPts val="1232"/>
+                <a:spcPts val="986"/>
               </a:lnSpc>
             </a:pPr>
             <a:r>
-              <a:rPr sz="850" b="1">
+              <a:rPr sz="680" b="0">
                 <a:solidFill>
-                  <a:srgbClr val="C1A4D6"/>
+                  <a:srgbClr val="12151C"/>
                 </a:solidFill>
                 <a:latin typeface="맑은 고딕"/>
                 <a:ea typeface="맑은 고딕"/>
               </a:rPr>
-              <a:t>헤어 디자이너</a:t>
-            </a:r>
-          </a:p>
-        </p:txBody>
-      </p:sp>
-      <p:sp>
-        <p:nvSpPr>
-          <p:cNvPr id="11" name="Rectangle 10"/>
-          <p:cNvSpPr/>
+              <a:t>주소를 입력해 주세요</a:t>
+            </a:r>
+          </a:p>
+        </p:txBody>
+      </p:sp>
+      <p:sp>
+        <p:nvSpPr>
+          <p:cNvPr id="10" name="텍스트"/>
+          <p:cNvSpPr txBox="1"/>
           <p:nvPr/>
         </p:nvSpPr>
         <p:spPr>
           <a:xfrm>
-            <a:off x="396000" y="1051200"/>
-            <a:ext cx="230400" cy="14400"/>
-          </a:xfrm>
-          <a:prstGeom prst="rect">
-            <a:avLst/>
-          </a:prstGeom>
-          <a:solidFill>
-            <a:srgbClr val="AC85C8"/>
-          </a:solidFill>
-          <a:ln>
-            <a:noFill/>
-          </a:ln>
-        </p:spPr>
-        <p:txBody>
-          <a:bodyPr rtlCol="0" anchor="ctr"/>
-          <a:lstStyle/>
-          <a:p>
-            <a:pPr algn="ctr"/>
-          </a:p>
-        </p:txBody>
-      </p:sp>
-      <p:sp>
-        <p:nvSpPr>
-          <p:cNvPr id="12" name="텍스트"/>
-          <p:cNvSpPr txBox="1"/>
-          <p:nvPr/>
-        </p:nvSpPr>
-        <p:spPr>
-          <a:xfrm>
-            <a:off x="396000" y="1188000"/>
-            <a:ext cx="122400" cy="168911"/>
+            <a:off x="252000" y="1526400"/>
+            <a:ext cx="216000" cy="95251"/>
           </a:xfrm>
           <a:prstGeom prst="rect">
             <a:avLst/>
@@ -3428,32 +3411,32 @@
           <a:p>
             <a:pPr algn="l">
               <a:lnSpc>
-                <a:spcPts val="1015"/>
+                <a:spcPts val="725"/>
               </a:lnSpc>
             </a:pPr>
             <a:r>
-              <a:rPr sz="700" b="1">
+              <a:rPr sz="500" b="1" spc="120">
                 <a:solidFill>
-                  <a:srgbClr val="C1A4D6"/>
+                  <a:srgbClr val="334220"/>
                 </a:solidFill>
                 <a:latin typeface="맑은 고딕"/>
                 <a:ea typeface="맑은 고딕"/>
               </a:rPr>
-              <a:t>T</a:t>
-            </a:r>
-          </a:p>
-        </p:txBody>
-      </p:sp>
-      <p:sp>
-        <p:nvSpPr>
-          <p:cNvPr id="13" name="텍스트"/>
+              <a:t>TEL</a:t>
+            </a:r>
+          </a:p>
+        </p:txBody>
+      </p:sp>
+      <p:sp>
+        <p:nvSpPr>
+          <p:cNvPr id="11" name="텍스트"/>
           <p:cNvSpPr txBox="1"/>
           <p:nvPr/>
         </p:nvSpPr>
         <p:spPr>
           <a:xfrm>
-            <a:off x="540000" y="1188000"/>
-            <a:ext cx="1872000" cy="168911"/>
+            <a:off x="1080000" y="1526400"/>
+            <a:ext cx="216000" cy="95251"/>
           </a:xfrm>
           <a:prstGeom prst="rect">
             <a:avLst/>
@@ -3468,32 +3451,32 @@
           <a:p>
             <a:pPr algn="l">
               <a:lnSpc>
-                <a:spcPts val="1015"/>
+                <a:spcPts val="725"/>
               </a:lnSpc>
             </a:pPr>
             <a:r>
-              <a:rPr sz="700" b="0">
+              <a:rPr sz="500" b="1" spc="120">
                 <a:solidFill>
-                  <a:srgbClr val="FFFFFF"/>
+                  <a:srgbClr val="334220"/>
                 </a:solidFill>
                 <a:latin typeface="맑은 고딕"/>
                 <a:ea typeface="맑은 고딕"/>
               </a:rPr>
-              <a:t>010-1234-5678</a:t>
-            </a:r>
-          </a:p>
-        </p:txBody>
-      </p:sp>
-      <p:sp>
-        <p:nvSpPr>
-          <p:cNvPr id="14" name="텍스트"/>
+              <a:t>MAIL</a:t>
+            </a:r>
+          </a:p>
+        </p:txBody>
+      </p:sp>
+      <p:sp>
+        <p:nvSpPr>
+          <p:cNvPr id="12" name="텍스트"/>
           <p:cNvSpPr txBox="1"/>
           <p:nvPr/>
         </p:nvSpPr>
         <p:spPr>
           <a:xfrm>
-            <a:off x="396000" y="1356911"/>
-            <a:ext cx="122400" cy="168911"/>
+            <a:off x="2052000" y="1526400"/>
+            <a:ext cx="216000" cy="95251"/>
           </a:xfrm>
           <a:prstGeom prst="rect">
             <a:avLst/>
@@ -3508,138 +3491,18 @@
           <a:p>
             <a:pPr algn="l">
               <a:lnSpc>
-                <a:spcPts val="1015"/>
+                <a:spcPts val="725"/>
               </a:lnSpc>
             </a:pPr>
             <a:r>
-              <a:rPr sz="700" b="1">
+              <a:rPr sz="500" b="1" spc="120">
                 <a:solidFill>
-                  <a:srgbClr val="C1A4D6"/>
+                  <a:srgbClr val="334220"/>
                 </a:solidFill>
                 <a:latin typeface="맑은 고딕"/>
                 <a:ea typeface="맑은 고딕"/>
               </a:rPr>
-              <a:t>E</a:t>
-            </a:r>
-          </a:p>
-        </p:txBody>
-      </p:sp>
-      <p:sp>
-        <p:nvSpPr>
-          <p:cNvPr id="15" name="텍스트"/>
-          <p:cNvSpPr txBox="1"/>
-          <p:nvPr/>
-        </p:nvSpPr>
-        <p:spPr>
-          <a:xfrm>
-            <a:off x="540000" y="1356911"/>
-            <a:ext cx="1872000" cy="168911"/>
-          </a:xfrm>
-          <a:prstGeom prst="rect">
-            <a:avLst/>
-          </a:prstGeom>
-          <a:noFill/>
-        </p:spPr>
-        <p:txBody>
-          <a:bodyPr wrap="square" lIns="0" rIns="0" tIns="0" bIns="0" anchor="t">
-            <a:spAutoFit/>
-          </a:bodyPr>
-          <a:lstStyle/>
-          <a:p>
-            <a:pPr algn="l">
-              <a:lnSpc>
-                <a:spcPts val="1015"/>
-              </a:lnSpc>
-            </a:pPr>
-            <a:r>
-              <a:rPr sz="700" b="0">
-                <a:solidFill>
-                  <a:srgbClr val="FFFFFF"/>
-                </a:solidFill>
-                <a:latin typeface="맑은 고딕"/>
-                <a:ea typeface="맑은 고딕"/>
-              </a:rPr>
-              <a:t>name@example.com</a:t>
-            </a:r>
-          </a:p>
-        </p:txBody>
-      </p:sp>
-      <p:sp>
-        <p:nvSpPr>
-          <p:cNvPr id="16" name="텍스트"/>
-          <p:cNvSpPr txBox="1"/>
-          <p:nvPr/>
-        </p:nvSpPr>
-        <p:spPr>
-          <a:xfrm>
-            <a:off x="396000" y="1525822"/>
-            <a:ext cx="122400" cy="168911"/>
-          </a:xfrm>
-          <a:prstGeom prst="rect">
-            <a:avLst/>
-          </a:prstGeom>
-          <a:noFill/>
-        </p:spPr>
-        <p:txBody>
-          <a:bodyPr wrap="square" lIns="0" rIns="0" tIns="0" bIns="0" anchor="t">
-            <a:spAutoFit/>
-          </a:bodyPr>
-          <a:lstStyle/>
-          <a:p>
-            <a:pPr algn="l">
-              <a:lnSpc>
-                <a:spcPts val="1015"/>
-              </a:lnSpc>
-            </a:pPr>
-            <a:r>
-              <a:rPr sz="700" b="1">
-                <a:solidFill>
-                  <a:srgbClr val="C1A4D6"/>
-                </a:solidFill>
-                <a:latin typeface="맑은 고딕"/>
-                <a:ea typeface="맑은 고딕"/>
-              </a:rPr>
-              <a:t>A</a:t>
-            </a:r>
-          </a:p>
-        </p:txBody>
-      </p:sp>
-      <p:sp>
-        <p:nvSpPr>
-          <p:cNvPr id="17" name="텍스트"/>
-          <p:cNvSpPr txBox="1"/>
-          <p:nvPr/>
-        </p:nvSpPr>
-        <p:spPr>
-          <a:xfrm>
-            <a:off x="540000" y="1525822"/>
-            <a:ext cx="1872000" cy="168911"/>
-          </a:xfrm>
-          <a:prstGeom prst="rect">
-            <a:avLst/>
-          </a:prstGeom>
-          <a:noFill/>
-        </p:spPr>
-        <p:txBody>
-          <a:bodyPr wrap="square" lIns="0" rIns="0" tIns="0" bIns="0" anchor="t">
-            <a:spAutoFit/>
-          </a:bodyPr>
-          <a:lstStyle/>
-          <a:p>
-            <a:pPr algn="l">
-              <a:lnSpc>
-                <a:spcPts val="1015"/>
-              </a:lnSpc>
-            </a:pPr>
-            <a:r>
-              <a:rPr sz="700" b="0">
-                <a:solidFill>
-                  <a:srgbClr val="FFFFFF"/>
-                </a:solidFill>
-                <a:latin typeface="맑은 고딕"/>
-                <a:ea typeface="맑은 고딕"/>
-              </a:rPr>
-              <a:t>주소를 입력해 주세요</a:t>
+              <a:t>ADDR</a:t>
             </a:r>
           </a:p>
         </p:txBody>
@@ -3658,7 +3521,7 @@
     <p:bg>
       <p:bgPr>
         <a:solidFill>
-          <a:srgbClr val="FBF8F2"/>
+          <a:srgbClr val="F6FCEA"/>
         </a:solidFill>
         <a:effectLst/>
       </p:bgPr>
@@ -3672,286 +3535,14 @@
       <p:grpSpPr/>
       <p:sp>
         <p:nvSpPr>
-          <p:cNvPr id="2" name="Freeform 1"/>
-          <p:cNvSpPr/>
+          <p:cNvPr id="2" name="텍스트"/>
+          <p:cNvSpPr txBox="1"/>
           <p:nvPr/>
         </p:nvSpPr>
         <p:spPr>
           <a:xfrm>
-            <a:off x="2016000" y="576000"/>
-            <a:ext cx="1224000" cy="1224000"/>
-          </a:xfrm>
-          <a:custGeom>
-            <a:avLst/>
-            <a:gdLst/>
-            <a:ahLst/>
-            <a:cxnLst/>
-            <a:rect l="l" t="t" r="r" b="b"/>
-            <a:pathLst>
-              <a:path w="1224000" h="1224000">
-                <a:moveTo>
-                  <a:pt x="1224000" y="1224000"/>
-                </a:moveTo>
-                <a:lnTo>
-                  <a:pt x="0" y="1224000"/>
-                </a:lnTo>
-                <a:lnTo>
-                  <a:pt x="7696" y="1086955"/>
-                </a:lnTo>
-                <a:lnTo>
-                  <a:pt x="30688" y="951634"/>
-                </a:lnTo>
-                <a:lnTo>
-                  <a:pt x="68687" y="819738"/>
-                </a:lnTo>
-                <a:lnTo>
-                  <a:pt x="121214" y="692926"/>
-                </a:lnTo>
-                <a:lnTo>
-                  <a:pt x="187610" y="572793"/>
-                </a:lnTo>
-                <a:lnTo>
-                  <a:pt x="267038" y="460848"/>
-                </a:lnTo>
-                <a:lnTo>
-                  <a:pt x="358501" y="358501"/>
-                </a:lnTo>
-                <a:lnTo>
-                  <a:pt x="460848" y="267038"/>
-                </a:lnTo>
-                <a:lnTo>
-                  <a:pt x="572793" y="187610"/>
-                </a:lnTo>
-                <a:lnTo>
-                  <a:pt x="692926" y="121214"/>
-                </a:lnTo>
-                <a:lnTo>
-                  <a:pt x="819738" y="68687"/>
-                </a:lnTo>
-                <a:lnTo>
-                  <a:pt x="951634" y="30688"/>
-                </a:lnTo>
-                <a:lnTo>
-                  <a:pt x="1086955" y="7696"/>
-                </a:lnTo>
-                <a:lnTo>
-                  <a:pt x="1224000" y="0"/>
-                </a:lnTo>
-                <a:close/>
-              </a:path>
-            </a:pathLst>
-          </a:custGeom>
-          <a:solidFill>
-            <a:srgbClr val="868D3F"/>
-          </a:solidFill>
-          <a:ln>
-            <a:noFill/>
-          </a:ln>
-        </p:spPr>
-        <p:txBody>
-          <a:bodyPr rtlCol="0" anchor="ctr"/>
-          <a:lstStyle/>
-          <a:p>
-            <a:pPr algn="ctr"/>
-          </a:p>
-        </p:txBody>
-      </p:sp>
-      <p:sp>
-        <p:nvSpPr>
-          <p:cNvPr id="3" name="Freeform 2"/>
-          <p:cNvSpPr/>
-          <p:nvPr/>
-        </p:nvSpPr>
-        <p:spPr>
-          <a:xfrm>
-            <a:off x="2520000" y="1080000"/>
-            <a:ext cx="720000" cy="720000"/>
-          </a:xfrm>
-          <a:custGeom>
-            <a:avLst/>
-            <a:gdLst/>
-            <a:ahLst/>
-            <a:cxnLst/>
-            <a:rect l="l" t="t" r="r" b="b"/>
-            <a:pathLst>
-              <a:path w="720000" h="720000">
-                <a:moveTo>
-                  <a:pt x="720000" y="720000"/>
-                </a:moveTo>
-                <a:lnTo>
-                  <a:pt x="0" y="720000"/>
-                </a:lnTo>
-                <a:lnTo>
-                  <a:pt x="4527" y="639386"/>
-                </a:lnTo>
-                <a:lnTo>
-                  <a:pt x="18052" y="559785"/>
-                </a:lnTo>
-                <a:lnTo>
-                  <a:pt x="40404" y="482199"/>
-                </a:lnTo>
-                <a:lnTo>
-                  <a:pt x="71302" y="407604"/>
-                </a:lnTo>
-                <a:lnTo>
-                  <a:pt x="110359" y="336937"/>
-                </a:lnTo>
-                <a:lnTo>
-                  <a:pt x="157081" y="271087"/>
-                </a:lnTo>
-                <a:lnTo>
-                  <a:pt x="210883" y="210883"/>
-                </a:lnTo>
-                <a:lnTo>
-                  <a:pt x="271087" y="157081"/>
-                </a:lnTo>
-                <a:lnTo>
-                  <a:pt x="336937" y="110359"/>
-                </a:lnTo>
-                <a:lnTo>
-                  <a:pt x="407604" y="71302"/>
-                </a:lnTo>
-                <a:lnTo>
-                  <a:pt x="482199" y="40404"/>
-                </a:lnTo>
-                <a:lnTo>
-                  <a:pt x="559785" y="18052"/>
-                </a:lnTo>
-                <a:lnTo>
-                  <a:pt x="639386" y="4527"/>
-                </a:lnTo>
-                <a:lnTo>
-                  <a:pt x="720000" y="0"/>
-                </a:lnTo>
-                <a:close/>
-              </a:path>
-            </a:pathLst>
-          </a:custGeom>
-          <a:solidFill>
-            <a:srgbClr val="DDDFC9"/>
-          </a:solidFill>
-          <a:ln>
-            <a:noFill/>
-          </a:ln>
-        </p:spPr>
-        <p:txBody>
-          <a:bodyPr rtlCol="0" anchor="ctr"/>
-          <a:lstStyle/>
-          <a:p>
-            <a:pPr algn="ctr"/>
-          </a:p>
-        </p:txBody>
-      </p:sp>
-      <p:sp>
-        <p:nvSpPr>
-          <p:cNvPr id="4" name="Oval 3"/>
-          <p:cNvSpPr/>
-          <p:nvPr/>
-        </p:nvSpPr>
-        <p:spPr>
-          <a:xfrm>
-            <a:off x="2791800" y="1513800"/>
-            <a:ext cx="65520" cy="65520"/>
-          </a:xfrm>
-          <a:prstGeom prst="ellipse">
-            <a:avLst/>
-          </a:prstGeom>
-          <a:noFill/>
-          <a:ln w="15120">
-            <a:solidFill>
-              <a:srgbClr val="FFFFFF"/>
-            </a:solidFill>
-          </a:ln>
-        </p:spPr>
-        <p:txBody>
-          <a:bodyPr rtlCol="0" anchor="ctr"/>
-          <a:lstStyle/>
-          <a:p>
-            <a:pPr algn="ctr"/>
-          </a:p>
-        </p:txBody>
-      </p:sp>
-      <p:sp>
-        <p:nvSpPr>
-          <p:cNvPr id="5" name="Oval 4"/>
-          <p:cNvSpPr/>
-          <p:nvPr/>
-        </p:nvSpPr>
-        <p:spPr>
-          <a:xfrm>
-            <a:off x="2902680" y="1513800"/>
-            <a:ext cx="65520" cy="65520"/>
-          </a:xfrm>
-          <a:prstGeom prst="ellipse">
-            <a:avLst/>
-          </a:prstGeom>
-          <a:noFill/>
-          <a:ln w="15120">
-            <a:solidFill>
-              <a:srgbClr val="FFFFFF"/>
-            </a:solidFill>
-          </a:ln>
-        </p:spPr>
-        <p:txBody>
-          <a:bodyPr rtlCol="0" anchor="ctr"/>
-          <a:lstStyle/>
-          <a:p>
-            <a:pPr algn="ctr"/>
-          </a:p>
-        </p:txBody>
-      </p:sp>
-      <p:cxnSp>
-        <p:nvCxnSpPr>
-          <p:cNvPr id="6" name="Connector 5"/>
-          <p:cNvCxnSpPr/>
-          <p:nvPr/>
-        </p:nvCxnSpPr>
-        <p:spPr>
-          <a:xfrm flipV="1">
-            <a:off x="2844720" y="1370160"/>
-            <a:ext cx="95760" cy="151200"/>
-          </a:xfrm>
-          <a:prstGeom prst="line">
-            <a:avLst/>
-          </a:prstGeom>
-          <a:ln w="17640">
-            <a:solidFill>
-              <a:srgbClr val="737373"/>
-            </a:solidFill>
-          </a:ln>
-        </p:spPr>
-      </p:cxnSp>
-      <p:cxnSp>
-        <p:nvCxnSpPr>
-          <p:cNvPr id="7" name="Connector 6"/>
-          <p:cNvCxnSpPr/>
-          <p:nvPr/>
-        </p:nvCxnSpPr>
-        <p:spPr>
-          <a:xfrm flipH="1" flipV="1">
-            <a:off x="2819520" y="1370160"/>
-            <a:ext cx="95760" cy="151200"/>
-          </a:xfrm>
-          <a:prstGeom prst="line">
-            <a:avLst/>
-          </a:prstGeom>
-          <a:ln w="17640">
-            <a:solidFill>
-              <a:srgbClr val="FFFFFF"/>
-            </a:solidFill>
-          </a:ln>
-        </p:spPr>
-      </p:cxnSp>
-      <p:sp>
-        <p:nvSpPr>
-          <p:cNvPr id="8" name="텍스트"/>
-          <p:cNvSpPr txBox="1"/>
-          <p:nvPr/>
-        </p:nvSpPr>
-        <p:spPr>
-          <a:xfrm>
-            <a:off x="252000" y="324000"/>
-            <a:ext cx="1944000" cy="720000"/>
+            <a:off x="216000" y="72000"/>
+            <a:ext cx="1080000" cy="936000"/>
           </a:xfrm>
           <a:prstGeom prst="rect">
             <a:avLst/>
@@ -3966,49 +3557,32 @@
           <a:p>
             <a:pPr algn="l">
               <a:lnSpc>
-                <a:spcPts val="1739"/>
+                <a:spcPts val="15950"/>
               </a:lnSpc>
             </a:pPr>
             <a:r>
-              <a:rPr sz="1200" b="1">
+              <a:rPr sz="11000" b="1">
                 <a:solidFill>
-                  <a:srgbClr val="573371"/>
+                  <a:srgbClr val="A6E22E"/>
                 </a:solidFill>
                 <a:latin typeface="맑은 고딕"/>
                 <a:ea typeface="맑은 고딕"/>
               </a:rPr>
-              <a:t>당신의 아름다움을</a:t>
-            </a:r>
-          </a:p>
-          <a:p>
-            <a:pPr algn="l">
-              <a:lnSpc>
-                <a:spcPts val="1739"/>
-              </a:lnSpc>
-            </a:pPr>
-            <a:r>
-              <a:rPr sz="1200" b="1">
-                <a:solidFill>
-                  <a:srgbClr val="573371"/>
-                </a:solidFill>
-                <a:latin typeface="맑은 고딕"/>
-                <a:ea typeface="맑은 고딕"/>
-              </a:rPr>
-              <a:t>존중합니다</a:t>
-            </a:r>
-          </a:p>
-        </p:txBody>
-      </p:sp>
-      <p:sp>
-        <p:nvSpPr>
-          <p:cNvPr id="9" name="텍스트"/>
+              <a:t>“</a:t>
+            </a:r>
+          </a:p>
+        </p:txBody>
+      </p:sp>
+      <p:sp>
+        <p:nvSpPr>
+          <p:cNvPr id="3" name="텍스트"/>
           <p:cNvSpPr txBox="1"/>
           <p:nvPr/>
         </p:nvSpPr>
         <p:spPr>
           <a:xfrm>
-            <a:off x="252000" y="1476000"/>
-            <a:ext cx="1440000" cy="108000"/>
+            <a:off x="252000" y="792000"/>
+            <a:ext cx="2520000" cy="648000"/>
           </a:xfrm>
           <a:prstGeom prst="rect">
             <a:avLst/>
@@ -4023,13 +3597,74 @@
           <a:p>
             <a:pPr algn="l">
               <a:lnSpc>
-                <a:spcPts val="1087"/>
+                <a:spcPts val="1812"/>
               </a:lnSpc>
             </a:pPr>
             <a:r>
-              <a:rPr sz="750" b="1" spc="200">
+              <a:rPr sz="1250" b="1">
                 <a:solidFill>
-                  <a:srgbClr val="7A6686"/>
+                  <a:srgbClr val="12151C"/>
+                </a:solidFill>
+                <a:latin typeface="맑은 고딕"/>
+                <a:ea typeface="맑은 고딕"/>
+              </a:rPr>
+              <a:t>당신의 아름다움을 존중합니다</a:t>
+            </a:r>
+          </a:p>
+        </p:txBody>
+      </p:sp>
+      <p:cxnSp>
+        <p:nvCxnSpPr>
+          <p:cNvPr id="4" name="Connector 3"/>
+          <p:cNvCxnSpPr/>
+          <p:nvPr/>
+        </p:nvCxnSpPr>
+        <p:spPr>
+          <a:xfrm>
+            <a:off x="252000" y="1512000"/>
+            <a:ext cx="2736000" cy="0"/>
+          </a:xfrm>
+          <a:prstGeom prst="line">
+            <a:avLst/>
+          </a:prstGeom>
+          <a:ln w="5760">
+            <a:solidFill>
+              <a:srgbClr val="E6F7C4"/>
+            </a:solidFill>
+          </a:ln>
+        </p:spPr>
+      </p:cxnSp>
+      <p:sp>
+        <p:nvSpPr>
+          <p:cNvPr id="5" name="텍스트"/>
+          <p:cNvSpPr txBox="1"/>
+          <p:nvPr/>
+        </p:nvSpPr>
+        <p:spPr>
+          <a:xfrm>
+            <a:off x="252000" y="1569600"/>
+            <a:ext cx="2736000" cy="123826"/>
+          </a:xfrm>
+          <a:prstGeom prst="rect">
+            <a:avLst/>
+          </a:prstGeom>
+          <a:noFill/>
+        </p:spPr>
+        <p:txBody>
+          <a:bodyPr wrap="square" lIns="0" rIns="0" tIns="0" bIns="0" anchor="t">
+            <a:spAutoFit/>
+          </a:bodyPr>
+          <a:lstStyle/>
+          <a:p>
+            <a:pPr algn="r">
+              <a:lnSpc>
+                <a:spcPts val="942"/>
+              </a:lnSpc>
+            </a:pPr>
+            <a:r>
+              <a:rPr sz="650" b="1" spc="200">
+                <a:solidFill>
+                  <a:srgbClr val="4A6323"/>
                 </a:solidFill>
                 <a:latin typeface="맑은 고딕"/>
                 <a:ea typeface="맑은 고딕"/>

--- a/public/fun/cards/beauty/beauty-01.pptx
+++ b/public/fun/cards/beauty/beauty-01.pptx
@@ -3099,56 +3099,45 @@
       <p:grpSpPr/>
       <p:sp>
         <p:nvSpPr>
-          <p:cNvPr id="2" name="텍스트"/>
-          <p:cNvSpPr txBox="1"/>
+          <p:cNvPr id="2" name="Rectangle 1"/>
+          <p:cNvSpPr/>
           <p:nvPr/>
         </p:nvSpPr>
         <p:spPr>
           <a:xfrm>
-            <a:off x="252000" y="223200"/>
-            <a:ext cx="2016000" cy="133351"/>
+            <a:off x="93600" y="93600"/>
+            <a:ext cx="3052800" cy="1612800"/>
           </a:xfrm>
           <a:prstGeom prst="rect">
             <a:avLst/>
           </a:prstGeom>
           <a:noFill/>
-        </p:spPr>
-        <p:txBody>
-          <a:bodyPr wrap="square" lIns="0" rIns="0" tIns="0" bIns="0" anchor="t">
-            <a:spAutoFit/>
-          </a:bodyPr>
-          <a:lstStyle/>
-          <a:p>
-            <a:pPr algn="l">
-              <a:lnSpc>
-                <a:spcPts val="1015"/>
-              </a:lnSpc>
-            </a:pPr>
-            <a:r>
-              <a:rPr sz="700" b="1" spc="200">
-                <a:solidFill>
-                  <a:srgbClr val="334220"/>
-                </a:solidFill>
-                <a:latin typeface="맑은 고딕"/>
-                <a:ea typeface="맑은 고딕"/>
-              </a:rPr>
-              <a:t>샵 이름</a:t>
-            </a:r>
-          </a:p>
-        </p:txBody>
-      </p:sp>
-      <p:sp>
-        <p:nvSpPr>
-          <p:cNvPr id="3" name="Oval 2"/>
+          <a:ln w="3600">
+            <a:solidFill>
+              <a:srgbClr val="6B9027"/>
+            </a:solidFill>
+          </a:ln>
+        </p:spPr>
+        <p:txBody>
+          <a:bodyPr rtlCol="0" anchor="ctr"/>
+          <a:lstStyle/>
+          <a:p>
+            <a:pPr algn="ctr"/>
+          </a:p>
+        </p:txBody>
+      </p:sp>
+      <p:sp>
+        <p:nvSpPr>
+          <p:cNvPr id="3" name="Rectangle 2"/>
           <p:cNvSpPr/>
           <p:nvPr/>
         </p:nvSpPr>
         <p:spPr>
           <a:xfrm>
-            <a:off x="2955600" y="241200"/>
-            <a:ext cx="64800" cy="64800"/>
-          </a:xfrm>
-          <a:prstGeom prst="ellipse">
+            <a:off x="252000" y="252000"/>
+            <a:ext cx="79200" cy="79200"/>
+          </a:xfrm>
+          <a:prstGeom prst="rect">
             <a:avLst/>
           </a:prstGeom>
           <a:solidFill>
@@ -3174,8 +3163,8 @@
         </p:nvSpPr>
         <p:spPr>
           <a:xfrm>
-            <a:off x="252000" y="676800"/>
-            <a:ext cx="2520000" cy="360000"/>
+            <a:off x="396000" y="259200"/>
+            <a:ext cx="1512000" cy="123826"/>
           </a:xfrm>
           <a:prstGeom prst="rect">
             <a:avLst/>
@@ -3190,11 +3179,72 @@
           <a:p>
             <a:pPr algn="l">
               <a:lnSpc>
-                <a:spcPts val="3190"/>
+                <a:spcPts val="942"/>
               </a:lnSpc>
             </a:pPr>
             <a:r>
-              <a:rPr sz="2200" b="1">
+              <a:rPr sz="650" b="1" spc="220">
+                <a:solidFill>
+                  <a:srgbClr val="334220"/>
+                </a:solidFill>
+                <a:latin typeface="맑은 고딕"/>
+                <a:ea typeface="맑은 고딕"/>
+              </a:rPr>
+              <a:t>샵 이름</a:t>
+            </a:r>
+          </a:p>
+        </p:txBody>
+      </p:sp>
+      <p:cxnSp>
+        <p:nvCxnSpPr>
+          <p:cNvPr id="5" name="Connector 4"/>
+          <p:cNvCxnSpPr/>
+          <p:nvPr/>
+        </p:nvCxnSpPr>
+        <p:spPr>
+          <a:xfrm>
+            <a:off x="252000" y="446400"/>
+            <a:ext cx="2736000" cy="0"/>
+          </a:xfrm>
+          <a:prstGeom prst="line">
+            <a:avLst/>
+          </a:prstGeom>
+          <a:ln w="3600">
+            <a:solidFill>
+              <a:srgbClr val="6B9027"/>
+            </a:solidFill>
+          </a:ln>
+        </p:spPr>
+      </p:cxnSp>
+      <p:sp>
+        <p:nvSpPr>
+          <p:cNvPr id="6" name="텍스트"/>
+          <p:cNvSpPr txBox="1"/>
+          <p:nvPr/>
+        </p:nvSpPr>
+        <p:spPr>
+          <a:xfrm>
+            <a:off x="252000" y="964800"/>
+            <a:ext cx="1800000" cy="237600"/>
+          </a:xfrm>
+          <a:prstGeom prst="rect">
+            <a:avLst/>
+          </a:prstGeom>
+          <a:noFill/>
+        </p:spPr>
+        <p:txBody>
+          <a:bodyPr wrap="square" lIns="0" rIns="0" tIns="0" bIns="0" anchor="t">
+            <a:spAutoFit/>
+          </a:bodyPr>
+          <a:lstStyle/>
+          <a:p>
+            <a:pPr algn="l">
+              <a:lnSpc>
+                <a:spcPts val="1957"/>
+              </a:lnSpc>
+            </a:pPr>
+            <a:r>
+              <a:rPr sz="1350" b="1" spc="120">
                 <a:solidFill>
                   <a:srgbClr val="12151C"/>
                 </a:solidFill>
@@ -3208,14 +3258,14 @@
       </p:sp>
       <p:sp>
         <p:nvSpPr>
-          <p:cNvPr id="5" name="텍스트"/>
+          <p:cNvPr id="7" name="텍스트"/>
           <p:cNvSpPr txBox="1"/>
           <p:nvPr/>
         </p:nvSpPr>
         <p:spPr>
           <a:xfrm>
-            <a:off x="252000" y="1080000"/>
-            <a:ext cx="2520000" cy="171451"/>
+            <a:off x="252000" y="1216800"/>
+            <a:ext cx="1800000" cy="133351"/>
           </a:xfrm>
           <a:prstGeom prst="rect">
             <a:avLst/>
@@ -3230,11 +3280,11 @@
           <a:p>
             <a:pPr algn="l">
               <a:lnSpc>
-                <a:spcPts val="1305"/>
+                <a:spcPts val="1015"/>
               </a:lnSpc>
             </a:pPr>
             <a:r>
-              <a:rPr sz="900" b="0">
+              <a:rPr sz="700" b="0" spc="60">
                 <a:solidFill>
                   <a:srgbClr val="334220"/>
                 </a:solidFill>
@@ -3248,19 +3298,19 @@
       </p:sp>
       <p:cxnSp>
         <p:nvCxnSpPr>
-          <p:cNvPr id="6" name="Connector 5"/>
+          <p:cNvPr id="8" name="Connector 7"/>
           <p:cNvCxnSpPr/>
           <p:nvPr/>
         </p:nvCxnSpPr>
         <p:spPr>
           <a:xfrm>
-            <a:off x="252000" y="1339200"/>
-            <a:ext cx="2736000" cy="0"/>
+            <a:off x="1872000" y="943200"/>
+            <a:ext cx="0" cy="604800"/>
           </a:xfrm>
           <a:prstGeom prst="line">
             <a:avLst/>
           </a:prstGeom>
-          <a:ln w="5760">
+          <a:ln w="3600">
             <a:solidFill>
               <a:srgbClr val="6B9027"/>
             </a:solidFill>
@@ -3269,14 +3319,14 @@
       </p:cxnSp>
       <p:sp>
         <p:nvSpPr>
-          <p:cNvPr id="7" name="텍스트"/>
+          <p:cNvPr id="9" name="텍스트"/>
           <p:cNvSpPr txBox="1"/>
           <p:nvPr/>
         </p:nvSpPr>
         <p:spPr>
           <a:xfrm>
-            <a:off x="252000" y="1411200"/>
-            <a:ext cx="792000" cy="129541"/>
+            <a:off x="2016000" y="1033200"/>
+            <a:ext cx="302400" cy="91441"/>
           </a:xfrm>
           <a:prstGeom prst="rect">
             <a:avLst/>
@@ -3291,11 +3341,51 @@
           <a:p>
             <a:pPr algn="l">
               <a:lnSpc>
-                <a:spcPts val="986"/>
+                <a:spcPts val="696"/>
               </a:lnSpc>
             </a:pPr>
             <a:r>
-              <a:rPr sz="680" b="0">
+              <a:rPr sz="480" b="1" spc="140">
+                <a:solidFill>
+                  <a:srgbClr val="334220"/>
+                </a:solidFill>
+                <a:latin typeface="맑은 고딕"/>
+                <a:ea typeface="맑은 고딕"/>
+              </a:rPr>
+              <a:t>TEL</a:t>
+            </a:r>
+          </a:p>
+        </p:txBody>
+      </p:sp>
+      <p:sp>
+        <p:nvSpPr>
+          <p:cNvPr id="10" name="텍스트"/>
+          <p:cNvSpPr txBox="1"/>
+          <p:nvPr/>
+        </p:nvSpPr>
+        <p:spPr>
+          <a:xfrm>
+            <a:off x="2318400" y="1022400"/>
+            <a:ext cx="972000" cy="123826"/>
+          </a:xfrm>
+          <a:prstGeom prst="rect">
+            <a:avLst/>
+          </a:prstGeom>
+          <a:noFill/>
+        </p:spPr>
+        <p:txBody>
+          <a:bodyPr wrap="square" lIns="0" rIns="0" tIns="0" bIns="0" anchor="t">
+            <a:spAutoFit/>
+          </a:bodyPr>
+          <a:lstStyle/>
+          <a:p>
+            <a:pPr algn="l">
+              <a:lnSpc>
+                <a:spcPts val="942"/>
+              </a:lnSpc>
+            </a:pPr>
+            <a:r>
+              <a:rPr sz="650" b="0">
                 <a:solidFill>
                   <a:srgbClr val="12151C"/>
                 </a:solidFill>
@@ -3309,14 +3399,14 @@
       </p:sp>
       <p:sp>
         <p:nvSpPr>
-          <p:cNvPr id="8" name="텍스트"/>
+          <p:cNvPr id="11" name="텍스트"/>
           <p:cNvSpPr txBox="1"/>
           <p:nvPr/>
         </p:nvSpPr>
         <p:spPr>
           <a:xfrm>
-            <a:off x="1080000" y="1411200"/>
-            <a:ext cx="900000" cy="129541"/>
+            <a:off x="2016000" y="1177200"/>
+            <a:ext cx="302400" cy="91441"/>
           </a:xfrm>
           <a:prstGeom prst="rect">
             <a:avLst/>
@@ -3331,11 +3421,51 @@
           <a:p>
             <a:pPr algn="l">
               <a:lnSpc>
-                <a:spcPts val="986"/>
+                <a:spcPts val="696"/>
               </a:lnSpc>
             </a:pPr>
             <a:r>
-              <a:rPr sz="680" b="0">
+              <a:rPr sz="480" b="1" spc="140">
+                <a:solidFill>
+                  <a:srgbClr val="334220"/>
+                </a:solidFill>
+                <a:latin typeface="맑은 고딕"/>
+                <a:ea typeface="맑은 고딕"/>
+              </a:rPr>
+              <a:t>MAIL</a:t>
+            </a:r>
+          </a:p>
+        </p:txBody>
+      </p:sp>
+      <p:sp>
+        <p:nvSpPr>
+          <p:cNvPr id="12" name="텍스트"/>
+          <p:cNvSpPr txBox="1"/>
+          <p:nvPr/>
+        </p:nvSpPr>
+        <p:spPr>
+          <a:xfrm>
+            <a:off x="2318400" y="1166400"/>
+            <a:ext cx="972000" cy="123826"/>
+          </a:xfrm>
+          <a:prstGeom prst="rect">
+            <a:avLst/>
+          </a:prstGeom>
+          <a:noFill/>
+        </p:spPr>
+        <p:txBody>
+          <a:bodyPr wrap="square" lIns="0" rIns="0" tIns="0" bIns="0" anchor="t">
+            <a:spAutoFit/>
+          </a:bodyPr>
+          <a:lstStyle/>
+          <a:p>
+            <a:pPr algn="l">
+              <a:lnSpc>
+                <a:spcPts val="942"/>
+              </a:lnSpc>
+            </a:pPr>
+            <a:r>
+              <a:rPr sz="650" b="0">
                 <a:solidFill>
                   <a:srgbClr val="12151C"/>
                 </a:solidFill>
@@ -3349,14 +3479,14 @@
       </p:sp>
       <p:sp>
         <p:nvSpPr>
-          <p:cNvPr id="9" name="텍스트"/>
+          <p:cNvPr id="13" name="텍스트"/>
           <p:cNvSpPr txBox="1"/>
           <p:nvPr/>
         </p:nvSpPr>
         <p:spPr>
           <a:xfrm>
-            <a:off x="2052000" y="1411200"/>
-            <a:ext cx="972000" cy="129541"/>
+            <a:off x="2016000" y="1321200"/>
+            <a:ext cx="302400" cy="91441"/>
           </a:xfrm>
           <a:prstGeom prst="rect">
             <a:avLst/>
@@ -3371,11 +3501,51 @@
           <a:p>
             <a:pPr algn="l">
               <a:lnSpc>
-                <a:spcPts val="986"/>
+                <a:spcPts val="696"/>
               </a:lnSpc>
             </a:pPr>
             <a:r>
-              <a:rPr sz="680" b="0">
+              <a:rPr sz="480" b="1" spc="140">
+                <a:solidFill>
+                  <a:srgbClr val="334220"/>
+                </a:solidFill>
+                <a:latin typeface="맑은 고딕"/>
+                <a:ea typeface="맑은 고딕"/>
+              </a:rPr>
+              <a:t>ADDR</a:t>
+            </a:r>
+          </a:p>
+        </p:txBody>
+      </p:sp>
+      <p:sp>
+        <p:nvSpPr>
+          <p:cNvPr id="14" name="텍스트"/>
+          <p:cNvSpPr txBox="1"/>
+          <p:nvPr/>
+        </p:nvSpPr>
+        <p:spPr>
+          <a:xfrm>
+            <a:off x="2318400" y="1310400"/>
+            <a:ext cx="972000" cy="123826"/>
+          </a:xfrm>
+          <a:prstGeom prst="rect">
+            <a:avLst/>
+          </a:prstGeom>
+          <a:noFill/>
+        </p:spPr>
+        <p:txBody>
+          <a:bodyPr wrap="square" lIns="0" rIns="0" tIns="0" bIns="0" anchor="t">
+            <a:spAutoFit/>
+          </a:bodyPr>
+          <a:lstStyle/>
+          <a:p>
+            <a:pPr algn="l">
+              <a:lnSpc>
+                <a:spcPts val="942"/>
+              </a:lnSpc>
+            </a:pPr>
+            <a:r>
+              <a:rPr sz="650" b="0">
                 <a:solidFill>
                   <a:srgbClr val="12151C"/>
                 </a:solidFill>
@@ -3383,126 +3553,6 @@
                 <a:ea typeface="맑은 고딕"/>
               </a:rPr>
               <a:t>주소를 입력해 주세요</a:t>
-            </a:r>
-          </a:p>
-        </p:txBody>
-      </p:sp>
-      <p:sp>
-        <p:nvSpPr>
-          <p:cNvPr id="10" name="텍스트"/>
-          <p:cNvSpPr txBox="1"/>
-          <p:nvPr/>
-        </p:nvSpPr>
-        <p:spPr>
-          <a:xfrm>
-            <a:off x="252000" y="1526400"/>
-            <a:ext cx="216000" cy="95251"/>
-          </a:xfrm>
-          <a:prstGeom prst="rect">
-            <a:avLst/>
-          </a:prstGeom>
-          <a:noFill/>
-        </p:spPr>
-        <p:txBody>
-          <a:bodyPr wrap="square" lIns="0" rIns="0" tIns="0" bIns="0" anchor="t">
-            <a:spAutoFit/>
-          </a:bodyPr>
-          <a:lstStyle/>
-          <a:p>
-            <a:pPr algn="l">
-              <a:lnSpc>
-                <a:spcPts val="725"/>
-              </a:lnSpc>
-            </a:pPr>
-            <a:r>
-              <a:rPr sz="500" b="1" spc="120">
-                <a:solidFill>
-                  <a:srgbClr val="334220"/>
-                </a:solidFill>
-                <a:latin typeface="맑은 고딕"/>
-                <a:ea typeface="맑은 고딕"/>
-              </a:rPr>
-              <a:t>TEL</a:t>
-            </a:r>
-          </a:p>
-        </p:txBody>
-      </p:sp>
-      <p:sp>
-        <p:nvSpPr>
-          <p:cNvPr id="11" name="텍스트"/>
-          <p:cNvSpPr txBox="1"/>
-          <p:nvPr/>
-        </p:nvSpPr>
-        <p:spPr>
-          <a:xfrm>
-            <a:off x="1080000" y="1526400"/>
-            <a:ext cx="216000" cy="95251"/>
-          </a:xfrm>
-          <a:prstGeom prst="rect">
-            <a:avLst/>
-          </a:prstGeom>
-          <a:noFill/>
-        </p:spPr>
-        <p:txBody>
-          <a:bodyPr wrap="square" lIns="0" rIns="0" tIns="0" bIns="0" anchor="t">
-            <a:spAutoFit/>
-          </a:bodyPr>
-          <a:lstStyle/>
-          <a:p>
-            <a:pPr algn="l">
-              <a:lnSpc>
-                <a:spcPts val="725"/>
-              </a:lnSpc>
-            </a:pPr>
-            <a:r>
-              <a:rPr sz="500" b="1" spc="120">
-                <a:solidFill>
-                  <a:srgbClr val="334220"/>
-                </a:solidFill>
-                <a:latin typeface="맑은 고딕"/>
-                <a:ea typeface="맑은 고딕"/>
-              </a:rPr>
-              <a:t>MAIL</a:t>
-            </a:r>
-          </a:p>
-        </p:txBody>
-      </p:sp>
-      <p:sp>
-        <p:nvSpPr>
-          <p:cNvPr id="12" name="텍스트"/>
-          <p:cNvSpPr txBox="1"/>
-          <p:nvPr/>
-        </p:nvSpPr>
-        <p:spPr>
-          <a:xfrm>
-            <a:off x="2052000" y="1526400"/>
-            <a:ext cx="216000" cy="95251"/>
-          </a:xfrm>
-          <a:prstGeom prst="rect">
-            <a:avLst/>
-          </a:prstGeom>
-          <a:noFill/>
-        </p:spPr>
-        <p:txBody>
-          <a:bodyPr wrap="square" lIns="0" rIns="0" tIns="0" bIns="0" anchor="t">
-            <a:spAutoFit/>
-          </a:bodyPr>
-          <a:lstStyle/>
-          <a:p>
-            <a:pPr algn="l">
-              <a:lnSpc>
-                <a:spcPts val="725"/>
-              </a:lnSpc>
-            </a:pPr>
-            <a:r>
-              <a:rPr sz="500" b="1" spc="120">
-                <a:solidFill>
-                  <a:srgbClr val="334220"/>
-                </a:solidFill>
-                <a:latin typeface="맑은 고딕"/>
-                <a:ea typeface="맑은 고딕"/>
-              </a:rPr>
-              <a:t>ADDR</a:t>
             </a:r>
           </a:p>
         </p:txBody>
@@ -3535,54 +3585,74 @@
       <p:grpSpPr/>
       <p:sp>
         <p:nvSpPr>
-          <p:cNvPr id="2" name="텍스트"/>
-          <p:cNvSpPr txBox="1"/>
+          <p:cNvPr id="2" name="Rectangle 1"/>
+          <p:cNvSpPr/>
           <p:nvPr/>
         </p:nvSpPr>
         <p:spPr>
           <a:xfrm>
-            <a:off x="216000" y="72000"/>
-            <a:ext cx="1080000" cy="936000"/>
+            <a:off x="0" y="0"/>
+            <a:ext cx="3240000" cy="1800000"/>
+          </a:xfrm>
+          <a:prstGeom prst="rect">
+            <a:avLst/>
+          </a:prstGeom>
+          <a:solidFill>
+            <a:srgbClr val="A6E22E"/>
+          </a:solidFill>
+          <a:ln>
+            <a:noFill/>
+          </a:ln>
+        </p:spPr>
+        <p:txBody>
+          <a:bodyPr rtlCol="0" anchor="ctr"/>
+          <a:lstStyle/>
+          <a:p>
+            <a:pPr algn="ctr"/>
+          </a:p>
+        </p:txBody>
+      </p:sp>
+      <p:sp>
+        <p:nvSpPr>
+          <p:cNvPr id="3" name="Rectangle 2"/>
+          <p:cNvSpPr/>
+          <p:nvPr/>
+        </p:nvSpPr>
+        <p:spPr>
+          <a:xfrm>
+            <a:off x="108000" y="108000"/>
+            <a:ext cx="3024000" cy="1584000"/>
           </a:xfrm>
           <a:prstGeom prst="rect">
             <a:avLst/>
           </a:prstGeom>
           <a:noFill/>
-        </p:spPr>
-        <p:txBody>
-          <a:bodyPr wrap="square" lIns="0" rIns="0" tIns="0" bIns="0" anchor="t">
-            <a:spAutoFit/>
-          </a:bodyPr>
-          <a:lstStyle/>
-          <a:p>
-            <a:pPr algn="l">
-              <a:lnSpc>
-                <a:spcPts val="15950"/>
-              </a:lnSpc>
-            </a:pPr>
-            <a:r>
-              <a:rPr sz="11000" b="1">
-                <a:solidFill>
-                  <a:srgbClr val="A6E22E"/>
-                </a:solidFill>
-                <a:latin typeface="맑은 고딕"/>
-                <a:ea typeface="맑은 고딕"/>
-              </a:rPr>
-              <a:t>“</a:t>
-            </a:r>
-          </a:p>
-        </p:txBody>
-      </p:sp>
-      <p:sp>
-        <p:nvSpPr>
-          <p:cNvPr id="3" name="텍스트"/>
+          <a:ln w="3600">
+            <a:solidFill>
+              <a:srgbClr val="12151C">
+                <a:alpha val="50000"/>
+              </a:srgbClr>
+            </a:solidFill>
+          </a:ln>
+        </p:spPr>
+        <p:txBody>
+          <a:bodyPr rtlCol="0" anchor="ctr"/>
+          <a:lstStyle/>
+          <a:p>
+            <a:pPr algn="ctr"/>
+          </a:p>
+        </p:txBody>
+      </p:sp>
+      <p:sp>
+        <p:nvSpPr>
+          <p:cNvPr id="4" name="텍스트"/>
           <p:cNvSpPr txBox="1"/>
           <p:nvPr/>
         </p:nvSpPr>
         <p:spPr>
           <a:xfrm>
-            <a:off x="252000" y="792000"/>
-            <a:ext cx="2520000" cy="648000"/>
+            <a:off x="288000" y="280800"/>
+            <a:ext cx="1440000" cy="99061"/>
           </a:xfrm>
           <a:prstGeom prst="rect">
             <a:avLst/>
@@ -3597,43 +3667,22 @@
           <a:p>
             <a:pPr algn="l">
               <a:lnSpc>
-                <a:spcPts val="1812"/>
+                <a:spcPts val="754"/>
               </a:lnSpc>
             </a:pPr>
             <a:r>
-              <a:rPr sz="1250" b="1">
+              <a:rPr sz="520" b="1" spc="240">
                 <a:solidFill>
                   <a:srgbClr val="12151C"/>
                 </a:solidFill>
                 <a:latin typeface="맑은 고딕"/>
                 <a:ea typeface="맑은 고딕"/>
               </a:rPr>
-              <a:t>당신의 아름다움을 존중합니다</a:t>
-            </a:r>
-          </a:p>
-        </p:txBody>
-      </p:sp>
-      <p:cxnSp>
-        <p:nvCxnSpPr>
-          <p:cNvPr id="4" name="Connector 3"/>
-          <p:cNvCxnSpPr/>
-          <p:nvPr/>
-        </p:nvCxnSpPr>
-        <p:spPr>
-          <a:xfrm>
-            <a:off x="252000" y="1512000"/>
-            <a:ext cx="2736000" cy="0"/>
-          </a:xfrm>
-          <a:prstGeom prst="line">
-            <a:avLst/>
-          </a:prstGeom>
-          <a:ln w="5760">
-            <a:solidFill>
-              <a:srgbClr val="E6F7C4"/>
-            </a:solidFill>
-          </a:ln>
-        </p:spPr>
-      </p:cxnSp>
+              <a:t>시술 안내</a:t>
+            </a:r>
+          </a:p>
+        </p:txBody>
+      </p:sp>
       <p:sp>
         <p:nvSpPr>
           <p:cNvPr id="5" name="텍스트"/>
@@ -3642,8 +3691,8 @@
         </p:nvSpPr>
         <p:spPr>
           <a:xfrm>
-            <a:off x="252000" y="1569600"/>
-            <a:ext cx="2736000" cy="123826"/>
+            <a:off x="288000" y="468000"/>
+            <a:ext cx="1872000" cy="216000"/>
           </a:xfrm>
           <a:prstGeom prst="rect">
             <a:avLst/>
@@ -3656,15 +3705,423 @@
           </a:bodyPr>
           <a:lstStyle/>
           <a:p>
-            <a:pPr algn="r">
+            <a:pPr algn="l">
+              <a:lnSpc>
+                <a:spcPts val="1377"/>
+              </a:lnSpc>
+            </a:pPr>
+            <a:r>
+              <a:rPr sz="950" b="1">
+                <a:solidFill>
+                  <a:srgbClr val="12151C"/>
+                </a:solidFill>
+                <a:latin typeface="맑은 고딕"/>
+                <a:ea typeface="맑은 고딕"/>
+              </a:rPr>
+              <a:t>펌</a:t>
+            </a:r>
+          </a:p>
+        </p:txBody>
+      </p:sp>
+      <p:cxnSp>
+        <p:nvCxnSpPr>
+          <p:cNvPr id="6" name="Connector 5"/>
+          <p:cNvCxnSpPr/>
+          <p:nvPr/>
+        </p:nvCxnSpPr>
+        <p:spPr>
+          <a:xfrm>
+            <a:off x="288000" y="669600"/>
+            <a:ext cx="1728000" cy="0"/>
+          </a:xfrm>
+          <a:prstGeom prst="line">
+            <a:avLst/>
+          </a:prstGeom>
+          <a:ln w="3600">
+            <a:solidFill>
+              <a:srgbClr val="12151C"/>
+            </a:solidFill>
+          </a:ln>
+        </p:spPr>
+      </p:cxnSp>
+      <p:sp>
+        <p:nvSpPr>
+          <p:cNvPr id="7" name="텍스트"/>
+          <p:cNvSpPr txBox="1"/>
+          <p:nvPr/>
+        </p:nvSpPr>
+        <p:spPr>
+          <a:xfrm>
+            <a:off x="288000" y="691200"/>
+            <a:ext cx="1872000" cy="216000"/>
+          </a:xfrm>
+          <a:prstGeom prst="rect">
+            <a:avLst/>
+          </a:prstGeom>
+          <a:noFill/>
+        </p:spPr>
+        <p:txBody>
+          <a:bodyPr wrap="square" lIns="0" rIns="0" tIns="0" bIns="0" anchor="t">
+            <a:spAutoFit/>
+          </a:bodyPr>
+          <a:lstStyle/>
+          <a:p>
+            <a:pPr algn="l">
+              <a:lnSpc>
+                <a:spcPts val="1377"/>
+              </a:lnSpc>
+            </a:pPr>
+            <a:r>
+              <a:rPr sz="950" b="1">
+                <a:solidFill>
+                  <a:srgbClr val="12151C"/>
+                </a:solidFill>
+                <a:latin typeface="맑은 고딕"/>
+                <a:ea typeface="맑은 고딕"/>
+              </a:rPr>
+              <a:t>염색</a:t>
+            </a:r>
+          </a:p>
+        </p:txBody>
+      </p:sp>
+      <p:cxnSp>
+        <p:nvCxnSpPr>
+          <p:cNvPr id="8" name="Connector 7"/>
+          <p:cNvCxnSpPr/>
+          <p:nvPr/>
+        </p:nvCxnSpPr>
+        <p:spPr>
+          <a:xfrm>
+            <a:off x="288000" y="892800"/>
+            <a:ext cx="1728000" cy="0"/>
+          </a:xfrm>
+          <a:prstGeom prst="line">
+            <a:avLst/>
+          </a:prstGeom>
+          <a:ln w="3600">
+            <a:solidFill>
+              <a:srgbClr val="12151C"/>
+            </a:solidFill>
+          </a:ln>
+        </p:spPr>
+      </p:cxnSp>
+      <p:sp>
+        <p:nvSpPr>
+          <p:cNvPr id="9" name="텍스트"/>
+          <p:cNvSpPr txBox="1"/>
+          <p:nvPr/>
+        </p:nvSpPr>
+        <p:spPr>
+          <a:xfrm>
+            <a:off x="288000" y="914400"/>
+            <a:ext cx="1872000" cy="216000"/>
+          </a:xfrm>
+          <a:prstGeom prst="rect">
+            <a:avLst/>
+          </a:prstGeom>
+          <a:noFill/>
+        </p:spPr>
+        <p:txBody>
+          <a:bodyPr wrap="square" lIns="0" rIns="0" tIns="0" bIns="0" anchor="t">
+            <a:spAutoFit/>
+          </a:bodyPr>
+          <a:lstStyle/>
+          <a:p>
+            <a:pPr algn="l">
+              <a:lnSpc>
+                <a:spcPts val="1377"/>
+              </a:lnSpc>
+            </a:pPr>
+            <a:r>
+              <a:rPr sz="950" b="1">
+                <a:solidFill>
+                  <a:srgbClr val="12151C"/>
+                </a:solidFill>
+                <a:latin typeface="맑은 고딕"/>
+                <a:ea typeface="맑은 고딕"/>
+              </a:rPr>
+              <a:t>속눈썹</a:t>
+            </a:r>
+          </a:p>
+        </p:txBody>
+      </p:sp>
+      <p:cxnSp>
+        <p:nvCxnSpPr>
+          <p:cNvPr id="10" name="Connector 9"/>
+          <p:cNvCxnSpPr/>
+          <p:nvPr/>
+        </p:nvCxnSpPr>
+        <p:spPr>
+          <a:xfrm>
+            <a:off x="288000" y="1116000"/>
+            <a:ext cx="1728000" cy="0"/>
+          </a:xfrm>
+          <a:prstGeom prst="line">
+            <a:avLst/>
+          </a:prstGeom>
+          <a:ln w="3600">
+            <a:solidFill>
+              <a:srgbClr val="12151C"/>
+            </a:solidFill>
+          </a:ln>
+        </p:spPr>
+      </p:cxnSp>
+      <p:sp>
+        <p:nvSpPr>
+          <p:cNvPr id="11" name="텍스트"/>
+          <p:cNvSpPr txBox="1"/>
+          <p:nvPr/>
+        </p:nvSpPr>
+        <p:spPr>
+          <a:xfrm>
+            <a:off x="288000" y="1137600"/>
+            <a:ext cx="1872000" cy="216000"/>
+          </a:xfrm>
+          <a:prstGeom prst="rect">
+            <a:avLst/>
+          </a:prstGeom>
+          <a:noFill/>
+        </p:spPr>
+        <p:txBody>
+          <a:bodyPr wrap="square" lIns="0" rIns="0" tIns="0" bIns="0" anchor="t">
+            <a:spAutoFit/>
+          </a:bodyPr>
+          <a:lstStyle/>
+          <a:p>
+            <a:pPr algn="l">
+              <a:lnSpc>
+                <a:spcPts val="1377"/>
+              </a:lnSpc>
+            </a:pPr>
+            <a:r>
+              <a:rPr sz="950" b="1">
+                <a:solidFill>
+                  <a:srgbClr val="12151C"/>
+                </a:solidFill>
+                <a:latin typeface="맑은 고딕"/>
+                <a:ea typeface="맑은 고딕"/>
+              </a:rPr>
+              <a:t>예약제 운영</a:t>
+            </a:r>
+          </a:p>
+        </p:txBody>
+      </p:sp>
+      <p:cxnSp>
+        <p:nvCxnSpPr>
+          <p:cNvPr id="12" name="Connector 11"/>
+          <p:cNvCxnSpPr/>
+          <p:nvPr/>
+        </p:nvCxnSpPr>
+        <p:spPr>
+          <a:xfrm>
+            <a:off x="288000" y="1339200"/>
+            <a:ext cx="1728000" cy="0"/>
+          </a:xfrm>
+          <a:prstGeom prst="line">
+            <a:avLst/>
+          </a:prstGeom>
+          <a:ln w="3600">
+            <a:solidFill>
+              <a:srgbClr val="12151C"/>
+            </a:solidFill>
+          </a:ln>
+        </p:spPr>
+      </p:cxnSp>
+      <p:sp>
+        <p:nvSpPr>
+          <p:cNvPr id="13" name="텍스트"/>
+          <p:cNvSpPr txBox="1"/>
+          <p:nvPr/>
+        </p:nvSpPr>
+        <p:spPr>
+          <a:xfrm>
+            <a:off x="2268000" y="468000"/>
+            <a:ext cx="864000" cy="91441"/>
+          </a:xfrm>
+          <a:prstGeom prst="rect">
+            <a:avLst/>
+          </a:prstGeom>
+          <a:noFill/>
+        </p:spPr>
+        <p:txBody>
+          <a:bodyPr wrap="square" lIns="0" rIns="0" tIns="0" bIns="0" anchor="t">
+            <a:spAutoFit/>
+          </a:bodyPr>
+          <a:lstStyle/>
+          <a:p>
+            <a:pPr algn="l">
+              <a:lnSpc>
+                <a:spcPts val="696"/>
+              </a:lnSpc>
+            </a:pPr>
+            <a:r>
+              <a:rPr sz="480" b="1" spc="140">
+                <a:solidFill>
+                  <a:srgbClr val="12151C">
+                    <a:alpha val="75000"/>
+                  </a:srgbClr>
+                </a:solidFill>
+                <a:latin typeface="맑은 고딕"/>
+                <a:ea typeface="맑은 고딕"/>
+              </a:rPr>
+              <a:t>HOURS</a:t>
+            </a:r>
+          </a:p>
+        </p:txBody>
+      </p:sp>
+      <p:sp>
+        <p:nvSpPr>
+          <p:cNvPr id="14" name="텍스트"/>
+          <p:cNvSpPr txBox="1"/>
+          <p:nvPr/>
+        </p:nvSpPr>
+        <p:spPr>
+          <a:xfrm>
+            <a:off x="2268000" y="576000"/>
+            <a:ext cx="864000" cy="118111"/>
+          </a:xfrm>
+          <a:prstGeom prst="rect">
+            <a:avLst/>
+          </a:prstGeom>
+          <a:noFill/>
+        </p:spPr>
+        <p:txBody>
+          <a:bodyPr wrap="square" lIns="0" rIns="0" tIns="0" bIns="0" anchor="t">
+            <a:spAutoFit/>
+          </a:bodyPr>
+          <a:lstStyle/>
+          <a:p>
+            <a:pPr algn="l">
+              <a:lnSpc>
+                <a:spcPts val="899"/>
+              </a:lnSpc>
+            </a:pPr>
+            <a:r>
+              <a:rPr sz="620" b="1">
+                <a:solidFill>
+                  <a:srgbClr val="12151C"/>
+                </a:solidFill>
+                <a:latin typeface="맑은 고딕"/>
+                <a:ea typeface="맑은 고딕"/>
+              </a:rPr>
+              <a:t>화–일 10:00 – 20:00</a:t>
+            </a:r>
+          </a:p>
+        </p:txBody>
+      </p:sp>
+      <p:sp>
+        <p:nvSpPr>
+          <p:cNvPr id="15" name="텍스트"/>
+          <p:cNvSpPr txBox="1"/>
+          <p:nvPr/>
+        </p:nvSpPr>
+        <p:spPr>
+          <a:xfrm>
+            <a:off x="2268000" y="900000"/>
+            <a:ext cx="864000" cy="91441"/>
+          </a:xfrm>
+          <a:prstGeom prst="rect">
+            <a:avLst/>
+          </a:prstGeom>
+          <a:noFill/>
+        </p:spPr>
+        <p:txBody>
+          <a:bodyPr wrap="square" lIns="0" rIns="0" tIns="0" bIns="0" anchor="t">
+            <a:spAutoFit/>
+          </a:bodyPr>
+          <a:lstStyle/>
+          <a:p>
+            <a:pPr algn="l">
+              <a:lnSpc>
+                <a:spcPts val="696"/>
+              </a:lnSpc>
+            </a:pPr>
+            <a:r>
+              <a:rPr sz="480" b="1" spc="140">
+                <a:solidFill>
+                  <a:srgbClr val="12151C">
+                    <a:alpha val="75000"/>
+                  </a:srgbClr>
+                </a:solidFill>
+                <a:latin typeface="맑은 고딕"/>
+                <a:ea typeface="맑은 고딕"/>
+              </a:rPr>
+              <a:t>INSTAGRAM</a:t>
+            </a:r>
+          </a:p>
+        </p:txBody>
+      </p:sp>
+      <p:sp>
+        <p:nvSpPr>
+          <p:cNvPr id="16" name="텍스트"/>
+          <p:cNvSpPr txBox="1"/>
+          <p:nvPr/>
+        </p:nvSpPr>
+        <p:spPr>
+          <a:xfrm>
+            <a:off x="2268000" y="1008000"/>
+            <a:ext cx="864000" cy="118111"/>
+          </a:xfrm>
+          <a:prstGeom prst="rect">
+            <a:avLst/>
+          </a:prstGeom>
+          <a:noFill/>
+        </p:spPr>
+        <p:txBody>
+          <a:bodyPr wrap="square" lIns="0" rIns="0" tIns="0" bIns="0" anchor="t">
+            <a:spAutoFit/>
+          </a:bodyPr>
+          <a:lstStyle/>
+          <a:p>
+            <a:pPr algn="l">
+              <a:lnSpc>
+                <a:spcPts val="899"/>
+              </a:lnSpc>
+            </a:pPr>
+            <a:r>
+              <a:rPr sz="620" b="1">
+                <a:solidFill>
+                  <a:srgbClr val="12151C"/>
+                </a:solidFill>
+                <a:latin typeface="맑은 고딕"/>
+                <a:ea typeface="맑은 고딕"/>
+              </a:rPr>
+              <a:t>@아이디</a:t>
+            </a:r>
+          </a:p>
+        </p:txBody>
+      </p:sp>
+      <p:sp>
+        <p:nvSpPr>
+          <p:cNvPr id="17" name="텍스트"/>
+          <p:cNvSpPr txBox="1"/>
+          <p:nvPr/>
+        </p:nvSpPr>
+        <p:spPr>
+          <a:xfrm>
+            <a:off x="288000" y="1512000"/>
+            <a:ext cx="1800000" cy="123826"/>
+          </a:xfrm>
+          <a:prstGeom prst="rect">
+            <a:avLst/>
+          </a:prstGeom>
+          <a:noFill/>
+        </p:spPr>
+        <p:txBody>
+          <a:bodyPr wrap="square" lIns="0" rIns="0" tIns="0" bIns="0" anchor="t">
+            <a:spAutoFit/>
+          </a:bodyPr>
+          <a:lstStyle/>
+          <a:p>
+            <a:pPr algn="l">
               <a:lnSpc>
                 <a:spcPts val="942"/>
               </a:lnSpc>
             </a:pPr>
             <a:r>
-              <a:rPr sz="650" b="1" spc="200">
+              <a:rPr sz="650" b="1" spc="220">
                 <a:solidFill>
-                  <a:srgbClr val="4A6323"/>
+                  <a:srgbClr val="12151C"/>
                 </a:solidFill>
                 <a:latin typeface="맑은 고딕"/>
                 <a:ea typeface="맑은 고딕"/>
